--- a/docs/pptx/carbo/ritu-carbo-linsubhr-egfrdisc-sideeffect.pptx
+++ b/docs/pptx/carbo/ritu-carbo-linsubhr-egfrdisc-sideeffect.pptx
@@ -2443,7 +2443,7 @@
           </p:nvSpPr>
           <p:spPr>
             <a:xfrm>
-              <a:off x="1810493" y="2073503"/>
+              <a:off x="1813815" y="2073503"/>
               <a:ext cx="0" cy="3649639"/>
             </a:xfrm>
             <a:custGeom>
@@ -2486,7 +2486,7 @@
           </p:nvSpPr>
           <p:spPr>
             <a:xfrm>
-              <a:off x="4291851" y="2073503"/>
+              <a:off x="4291714" y="2073503"/>
               <a:ext cx="0" cy="3649639"/>
             </a:xfrm>
             <a:custGeom>
@@ -2529,7 +2529,7 @@
           </p:nvSpPr>
           <p:spPr>
             <a:xfrm>
-              <a:off x="6773208" y="2073503"/>
+              <a:off x="6769614" y="2073503"/>
               <a:ext cx="0" cy="3649639"/>
             </a:xfrm>
             <a:custGeom>
@@ -2787,7 +2787,7 @@
           </p:nvSpPr>
           <p:spPr>
             <a:xfrm>
-              <a:off x="3051172" y="2073503"/>
+              <a:off x="3052764" y="2073503"/>
               <a:ext cx="0" cy="3649639"/>
             </a:xfrm>
             <a:custGeom>
@@ -2830,7 +2830,7 @@
           </p:nvSpPr>
           <p:spPr>
             <a:xfrm>
-              <a:off x="5532530" y="2073503"/>
+              <a:off x="5530664" y="2073503"/>
               <a:ext cx="0" cy="3649639"/>
             </a:xfrm>
             <a:custGeom>
@@ -2873,7 +2873,7 @@
           </p:nvSpPr>
           <p:spPr>
             <a:xfrm>
-              <a:off x="8013887" y="2073503"/>
+              <a:off x="8008563" y="2073503"/>
               <a:ext cx="0" cy="3649639"/>
             </a:xfrm>
             <a:custGeom>
@@ -2917,497 +2917,497 @@
           <p:spPr>
             <a:xfrm>
               <a:off x="1172049" y="2073503"/>
-              <a:ext cx="7090630" cy="3391485"/>
+              <a:ext cx="7090630" cy="3388536"/>
             </a:xfrm>
             <a:custGeom>
               <a:avLst/>
               <a:pathLst>
-                <a:path w="7090630" h="3391485">
+                <a:path w="7090630" h="3388536">
                   <a:moveTo>
-                    <a:pt x="2749422" y="0"/>
+                    <a:pt x="2757060" y="0"/>
                   </a:moveTo>
                   <a:lnTo>
-                    <a:pt x="2793278" y="126890"/>
-                  </a:lnTo>
-                  <a:lnTo>
-                    <a:pt x="2864901" y="322069"/>
-                  </a:lnTo>
-                  <a:lnTo>
-                    <a:pt x="2936523" y="505900"/>
-                  </a:lnTo>
-                  <a:lnTo>
-                    <a:pt x="3008146" y="679042"/>
-                  </a:lnTo>
-                  <a:lnTo>
-                    <a:pt x="3079768" y="842117"/>
-                  </a:lnTo>
-                  <a:lnTo>
-                    <a:pt x="3151391" y="995711"/>
-                  </a:lnTo>
-                  <a:lnTo>
-                    <a:pt x="3223013" y="1140374"/>
-                  </a:lnTo>
-                  <a:lnTo>
-                    <a:pt x="3294636" y="1276626"/>
-                  </a:lnTo>
-                  <a:lnTo>
-                    <a:pt x="3366258" y="1404955"/>
-                  </a:lnTo>
-                  <a:lnTo>
-                    <a:pt x="3437881" y="1525823"/>
-                  </a:lnTo>
-                  <a:lnTo>
-                    <a:pt x="3509503" y="1639664"/>
-                  </a:lnTo>
-                  <a:lnTo>
-                    <a:pt x="3581126" y="1746885"/>
-                  </a:lnTo>
-                  <a:lnTo>
-                    <a:pt x="3652748" y="1847872"/>
-                  </a:lnTo>
-                  <a:lnTo>
-                    <a:pt x="3724371" y="1942988"/>
-                  </a:lnTo>
-                  <a:lnTo>
-                    <a:pt x="3795993" y="2032573"/>
-                  </a:lnTo>
-                  <a:lnTo>
-                    <a:pt x="3867616" y="2116949"/>
-                  </a:lnTo>
-                  <a:lnTo>
-                    <a:pt x="3939238" y="2196419"/>
-                  </a:lnTo>
-                  <a:lnTo>
-                    <a:pt x="4010861" y="2271269"/>
-                  </a:lnTo>
-                  <a:lnTo>
-                    <a:pt x="4082483" y="2341767"/>
-                  </a:lnTo>
-                  <a:lnTo>
-                    <a:pt x="4154106" y="2408165"/>
-                  </a:lnTo>
-                  <a:lnTo>
-                    <a:pt x="4225729" y="2470703"/>
-                  </a:lnTo>
-                  <a:lnTo>
-                    <a:pt x="4297351" y="2529605"/>
-                  </a:lnTo>
-                  <a:lnTo>
-                    <a:pt x="4368974" y="2585082"/>
-                  </a:lnTo>
-                  <a:lnTo>
-                    <a:pt x="4440596" y="2637334"/>
-                  </a:lnTo>
-                  <a:lnTo>
-                    <a:pt x="4512219" y="2653534"/>
-                  </a:lnTo>
-                  <a:lnTo>
-                    <a:pt x="4583841" y="2652402"/>
-                  </a:lnTo>
-                  <a:lnTo>
-                    <a:pt x="4655464" y="2651269"/>
-                  </a:lnTo>
-                  <a:lnTo>
-                    <a:pt x="4727086" y="2650134"/>
-                  </a:lnTo>
-                  <a:lnTo>
-                    <a:pt x="4798709" y="2648998"/>
-                  </a:lnTo>
-                  <a:lnTo>
-                    <a:pt x="4870331" y="2647860"/>
-                  </a:lnTo>
-                  <a:lnTo>
-                    <a:pt x="4941954" y="2646721"/>
-                  </a:lnTo>
-                  <a:lnTo>
-                    <a:pt x="5013576" y="2645580"/>
-                  </a:lnTo>
-                  <a:lnTo>
-                    <a:pt x="5085199" y="2644437"/>
-                  </a:lnTo>
-                  <a:lnTo>
-                    <a:pt x="5156821" y="2643293"/>
-                  </a:lnTo>
-                  <a:lnTo>
-                    <a:pt x="5228444" y="2642147"/>
-                  </a:lnTo>
-                  <a:lnTo>
-                    <a:pt x="5300066" y="2641000"/>
-                  </a:lnTo>
-                  <a:lnTo>
-                    <a:pt x="5371689" y="2639851"/>
-                  </a:lnTo>
-                  <a:lnTo>
-                    <a:pt x="5443311" y="2638701"/>
-                  </a:lnTo>
-                  <a:lnTo>
-                    <a:pt x="5514934" y="2637549"/>
-                  </a:lnTo>
-                  <a:lnTo>
-                    <a:pt x="5586557" y="2636396"/>
-                  </a:lnTo>
-                  <a:lnTo>
-                    <a:pt x="5658179" y="2635241"/>
-                  </a:lnTo>
-                  <a:lnTo>
-                    <a:pt x="5729802" y="2634084"/>
-                  </a:lnTo>
-                  <a:lnTo>
-                    <a:pt x="5801424" y="2632926"/>
-                  </a:lnTo>
-                  <a:lnTo>
-                    <a:pt x="5873047" y="2631766"/>
-                  </a:lnTo>
-                  <a:lnTo>
-                    <a:pt x="5944669" y="2630605"/>
-                  </a:lnTo>
-                  <a:lnTo>
-                    <a:pt x="6016292" y="2629442"/>
-                  </a:lnTo>
-                  <a:lnTo>
-                    <a:pt x="6087914" y="2628277"/>
-                  </a:lnTo>
-                  <a:lnTo>
-                    <a:pt x="6159537" y="2627111"/>
-                  </a:lnTo>
-                  <a:lnTo>
-                    <a:pt x="6231159" y="2625943"/>
-                  </a:lnTo>
-                  <a:lnTo>
-                    <a:pt x="6302782" y="2624774"/>
-                  </a:lnTo>
-                  <a:lnTo>
-                    <a:pt x="6374404" y="2623603"/>
-                  </a:lnTo>
-                  <a:lnTo>
-                    <a:pt x="6446027" y="2622430"/>
-                  </a:lnTo>
-                  <a:lnTo>
-                    <a:pt x="6517649" y="2621256"/>
-                  </a:lnTo>
-                  <a:lnTo>
-                    <a:pt x="6589272" y="2620081"/>
-                  </a:lnTo>
-                  <a:lnTo>
-                    <a:pt x="6660894" y="2618903"/>
-                  </a:lnTo>
-                  <a:lnTo>
-                    <a:pt x="6732517" y="2617724"/>
-                  </a:lnTo>
-                  <a:lnTo>
-                    <a:pt x="6804139" y="2616544"/>
-                  </a:lnTo>
-                  <a:lnTo>
-                    <a:pt x="6875762" y="2615362"/>
-                  </a:lnTo>
-                  <a:lnTo>
-                    <a:pt x="6947385" y="2614178"/>
-                  </a:lnTo>
-                  <a:lnTo>
-                    <a:pt x="7019007" y="2612993"/>
-                  </a:lnTo>
-                  <a:lnTo>
-                    <a:pt x="7090630" y="2611806"/>
-                  </a:lnTo>
-                  <a:lnTo>
-                    <a:pt x="7090630" y="3391485"/>
-                  </a:lnTo>
-                  <a:lnTo>
-                    <a:pt x="7019007" y="3385790"/>
-                  </a:lnTo>
-                  <a:lnTo>
-                    <a:pt x="6947385" y="3379743"/>
-                  </a:lnTo>
-                  <a:lnTo>
-                    <a:pt x="6875762" y="3373322"/>
-                  </a:lnTo>
-                  <a:lnTo>
-                    <a:pt x="6804139" y="3366506"/>
-                  </a:lnTo>
-                  <a:lnTo>
-                    <a:pt x="6732517" y="3359268"/>
-                  </a:lnTo>
-                  <a:lnTo>
-                    <a:pt x="6660894" y="3351584"/>
-                  </a:lnTo>
-                  <a:lnTo>
-                    <a:pt x="6589272" y="3343425"/>
-                  </a:lnTo>
-                  <a:lnTo>
-                    <a:pt x="6517649" y="3334762"/>
-                  </a:lnTo>
-                  <a:lnTo>
-                    <a:pt x="6446027" y="3325565"/>
-                  </a:lnTo>
-                  <a:lnTo>
-                    <a:pt x="6374404" y="3315800"/>
-                  </a:lnTo>
-                  <a:lnTo>
-                    <a:pt x="6302782" y="3305432"/>
-                  </a:lnTo>
-                  <a:lnTo>
-                    <a:pt x="6231159" y="3294424"/>
-                  </a:lnTo>
-                  <a:lnTo>
-                    <a:pt x="6159537" y="3282737"/>
-                  </a:lnTo>
-                  <a:lnTo>
-                    <a:pt x="6087914" y="3270328"/>
-                  </a:lnTo>
-                  <a:lnTo>
-                    <a:pt x="6016292" y="3257153"/>
-                  </a:lnTo>
-                  <a:lnTo>
-                    <a:pt x="5944669" y="3243165"/>
-                  </a:lnTo>
-                  <a:lnTo>
-                    <a:pt x="5873047" y="3228313"/>
-                  </a:lnTo>
-                  <a:lnTo>
-                    <a:pt x="5801424" y="3212545"/>
-                  </a:lnTo>
-                  <a:lnTo>
-                    <a:pt x="5729802" y="3195803"/>
-                  </a:lnTo>
-                  <a:lnTo>
-                    <a:pt x="5658179" y="3178027"/>
-                  </a:lnTo>
-                  <a:lnTo>
-                    <a:pt x="5586557" y="3159154"/>
-                  </a:lnTo>
-                  <a:lnTo>
-                    <a:pt x="5514934" y="3139116"/>
-                  </a:lnTo>
-                  <a:lnTo>
-                    <a:pt x="5443311" y="3117841"/>
-                  </a:lnTo>
-                  <a:lnTo>
-                    <a:pt x="5371689" y="3095253"/>
-                  </a:lnTo>
-                  <a:lnTo>
-                    <a:pt x="5300066" y="3071270"/>
-                  </a:lnTo>
-                  <a:lnTo>
-                    <a:pt x="5228444" y="3045807"/>
-                  </a:lnTo>
-                  <a:lnTo>
-                    <a:pt x="5156821" y="3018771"/>
-                  </a:lnTo>
-                  <a:lnTo>
-                    <a:pt x="5085199" y="2990067"/>
-                  </a:lnTo>
-                  <a:lnTo>
-                    <a:pt x="5013576" y="2959591"/>
-                  </a:lnTo>
-                  <a:lnTo>
-                    <a:pt x="4941954" y="2927233"/>
-                  </a:lnTo>
-                  <a:lnTo>
-                    <a:pt x="4870331" y="2892878"/>
-                  </a:lnTo>
-                  <a:lnTo>
-                    <a:pt x="4798709" y="2856402"/>
-                  </a:lnTo>
-                  <a:lnTo>
-                    <a:pt x="4727086" y="2817674"/>
-                  </a:lnTo>
-                  <a:lnTo>
-                    <a:pt x="4655464" y="2776556"/>
-                  </a:lnTo>
-                  <a:lnTo>
-                    <a:pt x="4583841" y="2732899"/>
-                  </a:lnTo>
-                  <a:lnTo>
-                    <a:pt x="4512219" y="2686547"/>
-                  </a:lnTo>
-                  <a:lnTo>
-                    <a:pt x="4440596" y="2654664"/>
-                  </a:lnTo>
-                  <a:lnTo>
-                    <a:pt x="4368974" y="2655793"/>
-                  </a:lnTo>
-                  <a:lnTo>
-                    <a:pt x="4297351" y="2656920"/>
-                  </a:lnTo>
-                  <a:lnTo>
-                    <a:pt x="4225729" y="2658046"/>
-                  </a:lnTo>
-                  <a:lnTo>
-                    <a:pt x="4154106" y="2659170"/>
-                  </a:lnTo>
-                  <a:lnTo>
-                    <a:pt x="4082483" y="2660292"/>
-                  </a:lnTo>
-                  <a:lnTo>
-                    <a:pt x="4010861" y="2661413"/>
-                  </a:lnTo>
-                  <a:lnTo>
-                    <a:pt x="3939238" y="2662533"/>
-                  </a:lnTo>
-                  <a:lnTo>
-                    <a:pt x="3867616" y="2663650"/>
-                  </a:lnTo>
-                  <a:lnTo>
-                    <a:pt x="3795993" y="2664767"/>
-                  </a:lnTo>
-                  <a:lnTo>
-                    <a:pt x="3724371" y="2665882"/>
-                  </a:lnTo>
-                  <a:lnTo>
-                    <a:pt x="3652748" y="2666995"/>
-                  </a:lnTo>
-                  <a:lnTo>
-                    <a:pt x="3581126" y="2668107"/>
-                  </a:lnTo>
-                  <a:lnTo>
-                    <a:pt x="3509503" y="2669217"/>
-                  </a:lnTo>
-                  <a:lnTo>
-                    <a:pt x="3437881" y="2670326"/>
-                  </a:lnTo>
-                  <a:lnTo>
-                    <a:pt x="3366258" y="2671433"/>
-                  </a:lnTo>
-                  <a:lnTo>
-                    <a:pt x="3294636" y="2672539"/>
-                  </a:lnTo>
-                  <a:lnTo>
-                    <a:pt x="3223013" y="2673643"/>
-                  </a:lnTo>
-                  <a:lnTo>
-                    <a:pt x="3151391" y="2674746"/>
-                  </a:lnTo>
-                  <a:lnTo>
-                    <a:pt x="3079768" y="2675848"/>
-                  </a:lnTo>
-                  <a:lnTo>
-                    <a:pt x="3008146" y="2676947"/>
-                  </a:lnTo>
-                  <a:lnTo>
-                    <a:pt x="2936523" y="2678046"/>
-                  </a:lnTo>
-                  <a:lnTo>
-                    <a:pt x="2864901" y="2679142"/>
-                  </a:lnTo>
-                  <a:lnTo>
-                    <a:pt x="2793278" y="2680238"/>
-                  </a:lnTo>
-                  <a:lnTo>
-                    <a:pt x="2721655" y="2681332"/>
-                  </a:lnTo>
-                  <a:lnTo>
-                    <a:pt x="2650033" y="2682424"/>
-                  </a:lnTo>
-                  <a:lnTo>
-                    <a:pt x="2578410" y="2683515"/>
-                  </a:lnTo>
-                  <a:lnTo>
-                    <a:pt x="2506788" y="2684604"/>
-                  </a:lnTo>
-                  <a:lnTo>
-                    <a:pt x="2435165" y="2685692"/>
-                  </a:lnTo>
-                  <a:lnTo>
-                    <a:pt x="2363543" y="2686778"/>
-                  </a:lnTo>
-                  <a:lnTo>
-                    <a:pt x="2291920" y="2687863"/>
-                  </a:lnTo>
-                  <a:lnTo>
-                    <a:pt x="2220298" y="2688947"/>
-                  </a:lnTo>
-                  <a:lnTo>
-                    <a:pt x="2148675" y="2690029"/>
-                  </a:lnTo>
-                  <a:lnTo>
-                    <a:pt x="2077053" y="2691109"/>
-                  </a:lnTo>
-                  <a:lnTo>
-                    <a:pt x="2005430" y="2692188"/>
-                  </a:lnTo>
-                  <a:lnTo>
-                    <a:pt x="1933808" y="2693266"/>
-                  </a:lnTo>
-                  <a:lnTo>
-                    <a:pt x="1862185" y="2694342"/>
-                  </a:lnTo>
-                  <a:lnTo>
-                    <a:pt x="1790563" y="2695416"/>
-                  </a:lnTo>
-                  <a:lnTo>
-                    <a:pt x="1718940" y="2696489"/>
-                  </a:lnTo>
-                  <a:lnTo>
-                    <a:pt x="1647318" y="2697561"/>
-                  </a:lnTo>
-                  <a:lnTo>
-                    <a:pt x="1575695" y="2698631"/>
-                  </a:lnTo>
-                  <a:lnTo>
-                    <a:pt x="1504073" y="2699700"/>
-                  </a:lnTo>
-                  <a:lnTo>
-                    <a:pt x="1432450" y="2700767"/>
-                  </a:lnTo>
-                  <a:lnTo>
-                    <a:pt x="1360827" y="2701833"/>
-                  </a:lnTo>
-                  <a:lnTo>
-                    <a:pt x="1289205" y="2702898"/>
-                  </a:lnTo>
-                  <a:lnTo>
-                    <a:pt x="1217582" y="2703961"/>
-                  </a:lnTo>
-                  <a:lnTo>
-                    <a:pt x="1145960" y="2705022"/>
-                  </a:lnTo>
-                  <a:lnTo>
-                    <a:pt x="1074337" y="2706082"/>
-                  </a:lnTo>
-                  <a:lnTo>
-                    <a:pt x="1002715" y="2707141"/>
-                  </a:lnTo>
-                  <a:lnTo>
-                    <a:pt x="931092" y="2708198"/>
-                  </a:lnTo>
-                  <a:lnTo>
-                    <a:pt x="859470" y="2709254"/>
-                  </a:lnTo>
-                  <a:lnTo>
-                    <a:pt x="787847" y="2710308"/>
-                  </a:lnTo>
-                  <a:lnTo>
-                    <a:pt x="716225" y="2711361"/>
-                  </a:lnTo>
-                  <a:lnTo>
-                    <a:pt x="644602" y="2712413"/>
-                  </a:lnTo>
-                  <a:lnTo>
-                    <a:pt x="572980" y="2713463"/>
-                  </a:lnTo>
-                  <a:lnTo>
-                    <a:pt x="501357" y="2714511"/>
-                  </a:lnTo>
-                  <a:lnTo>
-                    <a:pt x="429735" y="2715558"/>
-                  </a:lnTo>
-                  <a:lnTo>
-                    <a:pt x="358112" y="2716604"/>
-                  </a:lnTo>
-                  <a:lnTo>
-                    <a:pt x="286490" y="2717648"/>
-                  </a:lnTo>
-                  <a:lnTo>
-                    <a:pt x="214867" y="2718691"/>
-                  </a:lnTo>
-                  <a:lnTo>
-                    <a:pt x="143245" y="2719733"/>
-                  </a:lnTo>
-                  <a:lnTo>
-                    <a:pt x="71622" y="2720773"/>
-                  </a:lnTo>
-                  <a:lnTo>
-                    <a:pt x="0" y="2721811"/>
+                    <a:pt x="2793278" y="104731"/>
+                  </a:lnTo>
+                  <a:lnTo>
+                    <a:pt x="2864901" y="299878"/>
+                  </a:lnTo>
+                  <a:lnTo>
+                    <a:pt x="2936523" y="483754"/>
+                  </a:lnTo>
+                  <a:lnTo>
+                    <a:pt x="3008146" y="657012"/>
+                  </a:lnTo>
+                  <a:lnTo>
+                    <a:pt x="3079768" y="820263"/>
+                  </a:lnTo>
+                  <a:lnTo>
+                    <a:pt x="3151391" y="974086"/>
+                  </a:lnTo>
+                  <a:lnTo>
+                    <a:pt x="3223013" y="1119026"/>
+                  </a:lnTo>
+                  <a:lnTo>
+                    <a:pt x="3294636" y="1255595"/>
+                  </a:lnTo>
+                  <a:lnTo>
+                    <a:pt x="3366258" y="1384276"/>
+                  </a:lnTo>
+                  <a:lnTo>
+                    <a:pt x="3437881" y="1505526"/>
+                  </a:lnTo>
+                  <a:lnTo>
+                    <a:pt x="3509503" y="1619774"/>
+                  </a:lnTo>
+                  <a:lnTo>
+                    <a:pt x="3581126" y="1727423"/>
+                  </a:lnTo>
+                  <a:lnTo>
+                    <a:pt x="3652748" y="1828855"/>
+                  </a:lnTo>
+                  <a:lnTo>
+                    <a:pt x="3724371" y="1924430"/>
+                  </a:lnTo>
+                  <a:lnTo>
+                    <a:pt x="3795993" y="2014484"/>
+                  </a:lnTo>
+                  <a:lnTo>
+                    <a:pt x="3867616" y="2099338"/>
+                  </a:lnTo>
+                  <a:lnTo>
+                    <a:pt x="3939238" y="2179291"/>
+                  </a:lnTo>
+                  <a:lnTo>
+                    <a:pt x="4010861" y="2254627"/>
+                  </a:lnTo>
+                  <a:lnTo>
+                    <a:pt x="4082483" y="2325612"/>
+                  </a:lnTo>
+                  <a:lnTo>
+                    <a:pt x="4154106" y="2392497"/>
+                  </a:lnTo>
+                  <a:lnTo>
+                    <a:pt x="4225729" y="2455520"/>
+                  </a:lnTo>
+                  <a:lnTo>
+                    <a:pt x="4297351" y="2514903"/>
+                  </a:lnTo>
+                  <a:lnTo>
+                    <a:pt x="4368974" y="2570856"/>
+                  </a:lnTo>
+                  <a:lnTo>
+                    <a:pt x="4440596" y="2623578"/>
+                  </a:lnTo>
+                  <a:lnTo>
+                    <a:pt x="4512219" y="2653756"/>
+                  </a:lnTo>
+                  <a:lnTo>
+                    <a:pt x="4583841" y="2652400"/>
+                  </a:lnTo>
+                  <a:lnTo>
+                    <a:pt x="4655464" y="2651042"/>
+                  </a:lnTo>
+                  <a:lnTo>
+                    <a:pt x="4727086" y="2649681"/>
+                  </a:lnTo>
+                  <a:lnTo>
+                    <a:pt x="4798709" y="2648318"/>
+                  </a:lnTo>
+                  <a:lnTo>
+                    <a:pt x="4870331" y="2646953"/>
+                  </a:lnTo>
+                  <a:lnTo>
+                    <a:pt x="4941954" y="2645586"/>
+                  </a:lnTo>
+                  <a:lnTo>
+                    <a:pt x="5013576" y="2644216"/>
+                  </a:lnTo>
+                  <a:lnTo>
+                    <a:pt x="5085199" y="2642845"/>
+                  </a:lnTo>
+                  <a:lnTo>
+                    <a:pt x="5156821" y="2641471"/>
+                  </a:lnTo>
+                  <a:lnTo>
+                    <a:pt x="5228444" y="2640095"/>
+                  </a:lnTo>
+                  <a:lnTo>
+                    <a:pt x="5300066" y="2638716"/>
+                  </a:lnTo>
+                  <a:lnTo>
+                    <a:pt x="5371689" y="2637335"/>
+                  </a:lnTo>
+                  <a:lnTo>
+                    <a:pt x="5443311" y="2635953"/>
+                  </a:lnTo>
+                  <a:lnTo>
+                    <a:pt x="5514934" y="2634567"/>
+                  </a:lnTo>
+                  <a:lnTo>
+                    <a:pt x="5586557" y="2633180"/>
+                  </a:lnTo>
+                  <a:lnTo>
+                    <a:pt x="5658179" y="2631790"/>
+                  </a:lnTo>
+                  <a:lnTo>
+                    <a:pt x="5729802" y="2630398"/>
+                  </a:lnTo>
+                  <a:lnTo>
+                    <a:pt x="5801424" y="2629004"/>
+                  </a:lnTo>
+                  <a:lnTo>
+                    <a:pt x="5873047" y="2627607"/>
+                  </a:lnTo>
+                  <a:lnTo>
+                    <a:pt x="5944669" y="2626208"/>
+                  </a:lnTo>
+                  <a:lnTo>
+                    <a:pt x="6016292" y="2624807"/>
+                  </a:lnTo>
+                  <a:lnTo>
+                    <a:pt x="6087914" y="2623404"/>
+                  </a:lnTo>
+                  <a:lnTo>
+                    <a:pt x="6159537" y="2621998"/>
+                  </a:lnTo>
+                  <a:lnTo>
+                    <a:pt x="6231159" y="2620590"/>
+                  </a:lnTo>
+                  <a:lnTo>
+                    <a:pt x="6302782" y="2619180"/>
+                  </a:lnTo>
+                  <a:lnTo>
+                    <a:pt x="6374404" y="2617767"/>
+                  </a:lnTo>
+                  <a:lnTo>
+                    <a:pt x="6446027" y="2616352"/>
+                  </a:lnTo>
+                  <a:lnTo>
+                    <a:pt x="6517649" y="2614935"/>
+                  </a:lnTo>
+                  <a:lnTo>
+                    <a:pt x="6589272" y="2613515"/>
+                  </a:lnTo>
+                  <a:lnTo>
+                    <a:pt x="6660894" y="2612094"/>
+                  </a:lnTo>
+                  <a:lnTo>
+                    <a:pt x="6732517" y="2610669"/>
+                  </a:lnTo>
+                  <a:lnTo>
+                    <a:pt x="6804139" y="2609243"/>
+                  </a:lnTo>
+                  <a:lnTo>
+                    <a:pt x="6875762" y="2607814"/>
+                  </a:lnTo>
+                  <a:lnTo>
+                    <a:pt x="6947385" y="2606383"/>
+                  </a:lnTo>
+                  <a:lnTo>
+                    <a:pt x="7019007" y="2604949"/>
+                  </a:lnTo>
+                  <a:lnTo>
+                    <a:pt x="7090630" y="2603513"/>
+                  </a:lnTo>
+                  <a:lnTo>
+                    <a:pt x="7090630" y="3388536"/>
+                  </a:lnTo>
+                  <a:lnTo>
+                    <a:pt x="7019007" y="3382700"/>
+                  </a:lnTo>
+                  <a:lnTo>
+                    <a:pt x="6947385" y="3376507"/>
+                  </a:lnTo>
+                  <a:lnTo>
+                    <a:pt x="6875762" y="3369934"/>
+                  </a:lnTo>
+                  <a:lnTo>
+                    <a:pt x="6804139" y="3362958"/>
+                  </a:lnTo>
+                  <a:lnTo>
+                    <a:pt x="6732517" y="3355554"/>
+                  </a:lnTo>
+                  <a:lnTo>
+                    <a:pt x="6660894" y="3347697"/>
+                  </a:lnTo>
+                  <a:lnTo>
+                    <a:pt x="6589272" y="3339358"/>
+                  </a:lnTo>
+                  <a:lnTo>
+                    <a:pt x="6517649" y="3330508"/>
+                  </a:lnTo>
+                  <a:lnTo>
+                    <a:pt x="6446027" y="3321116"/>
+                  </a:lnTo>
+                  <a:lnTo>
+                    <a:pt x="6374404" y="3311148"/>
+                  </a:lnTo>
+                  <a:lnTo>
+                    <a:pt x="6302782" y="3300569"/>
+                  </a:lnTo>
+                  <a:lnTo>
+                    <a:pt x="6231159" y="3289342"/>
+                  </a:lnTo>
+                  <a:lnTo>
+                    <a:pt x="6159537" y="3277426"/>
+                  </a:lnTo>
+                  <a:lnTo>
+                    <a:pt x="6087914" y="3264780"/>
+                  </a:lnTo>
+                  <a:lnTo>
+                    <a:pt x="6016292" y="3251359"/>
+                  </a:lnTo>
+                  <a:lnTo>
+                    <a:pt x="5944669" y="3237116"/>
+                  </a:lnTo>
+                  <a:lnTo>
+                    <a:pt x="5873047" y="3221999"/>
+                  </a:lnTo>
+                  <a:lnTo>
+                    <a:pt x="5801424" y="3205956"/>
+                  </a:lnTo>
+                  <a:lnTo>
+                    <a:pt x="5729802" y="3188930"/>
+                  </a:lnTo>
+                  <a:lnTo>
+                    <a:pt x="5658179" y="3170859"/>
+                  </a:lnTo>
+                  <a:lnTo>
+                    <a:pt x="5586557" y="3151682"/>
+                  </a:lnTo>
+                  <a:lnTo>
+                    <a:pt x="5514934" y="3131329"/>
+                  </a:lnTo>
+                  <a:lnTo>
+                    <a:pt x="5443311" y="3109728"/>
+                  </a:lnTo>
+                  <a:lnTo>
+                    <a:pt x="5371689" y="3086804"/>
+                  </a:lnTo>
+                  <a:lnTo>
+                    <a:pt x="5300066" y="3062474"/>
+                  </a:lnTo>
+                  <a:lnTo>
+                    <a:pt x="5228444" y="3036653"/>
+                  </a:lnTo>
+                  <a:lnTo>
+                    <a:pt x="5156821" y="3009250"/>
+                  </a:lnTo>
+                  <a:lnTo>
+                    <a:pt x="5085199" y="2980167"/>
+                  </a:lnTo>
+                  <a:lnTo>
+                    <a:pt x="5013576" y="2949301"/>
+                  </a:lnTo>
+                  <a:lnTo>
+                    <a:pt x="4941954" y="2916544"/>
+                  </a:lnTo>
+                  <a:lnTo>
+                    <a:pt x="4870331" y="2881779"/>
+                  </a:lnTo>
+                  <a:lnTo>
+                    <a:pt x="4798709" y="2844883"/>
+                  </a:lnTo>
+                  <a:lnTo>
+                    <a:pt x="4727086" y="2805725"/>
+                  </a:lnTo>
+                  <a:lnTo>
+                    <a:pt x="4655464" y="2764168"/>
+                  </a:lnTo>
+                  <a:lnTo>
+                    <a:pt x="4583841" y="2720063"/>
+                  </a:lnTo>
+                  <a:lnTo>
+                    <a:pt x="4512219" y="2673255"/>
+                  </a:lnTo>
+                  <a:lnTo>
+                    <a:pt x="4440596" y="2655110"/>
+                  </a:lnTo>
+                  <a:lnTo>
+                    <a:pt x="4368974" y="2656462"/>
+                  </a:lnTo>
+                  <a:lnTo>
+                    <a:pt x="4297351" y="2657811"/>
+                  </a:lnTo>
+                  <a:lnTo>
+                    <a:pt x="4225729" y="2659158"/>
+                  </a:lnTo>
+                  <a:lnTo>
+                    <a:pt x="4154106" y="2660503"/>
+                  </a:lnTo>
+                  <a:lnTo>
+                    <a:pt x="4082483" y="2661846"/>
+                  </a:lnTo>
+                  <a:lnTo>
+                    <a:pt x="4010861" y="2663187"/>
+                  </a:lnTo>
+                  <a:lnTo>
+                    <a:pt x="3939238" y="2664526"/>
+                  </a:lnTo>
+                  <a:lnTo>
+                    <a:pt x="3867616" y="2665862"/>
+                  </a:lnTo>
+                  <a:lnTo>
+                    <a:pt x="3795993" y="2667196"/>
+                  </a:lnTo>
+                  <a:lnTo>
+                    <a:pt x="3724371" y="2668528"/>
+                  </a:lnTo>
+                  <a:lnTo>
+                    <a:pt x="3652748" y="2669858"/>
+                  </a:lnTo>
+                  <a:lnTo>
+                    <a:pt x="3581126" y="2671186"/>
+                  </a:lnTo>
+                  <a:lnTo>
+                    <a:pt x="3509503" y="2672511"/>
+                  </a:lnTo>
+                  <a:lnTo>
+                    <a:pt x="3437881" y="2673834"/>
+                  </a:lnTo>
+                  <a:lnTo>
+                    <a:pt x="3366258" y="2675156"/>
+                  </a:lnTo>
+                  <a:lnTo>
+                    <a:pt x="3294636" y="2676475"/>
+                  </a:lnTo>
+                  <a:lnTo>
+                    <a:pt x="3223013" y="2677791"/>
+                  </a:lnTo>
+                  <a:lnTo>
+                    <a:pt x="3151391" y="2679106"/>
+                  </a:lnTo>
+                  <a:lnTo>
+                    <a:pt x="3079768" y="2680419"/>
+                  </a:lnTo>
+                  <a:lnTo>
+                    <a:pt x="3008146" y="2681729"/>
+                  </a:lnTo>
+                  <a:lnTo>
+                    <a:pt x="2936523" y="2683037"/>
+                  </a:lnTo>
+                  <a:lnTo>
+                    <a:pt x="2864901" y="2684343"/>
+                  </a:lnTo>
+                  <a:lnTo>
+                    <a:pt x="2793278" y="2685647"/>
+                  </a:lnTo>
+                  <a:lnTo>
+                    <a:pt x="2721655" y="2686949"/>
+                  </a:lnTo>
+                  <a:lnTo>
+                    <a:pt x="2650033" y="2688249"/>
+                  </a:lnTo>
+                  <a:lnTo>
+                    <a:pt x="2578410" y="2689547"/>
+                  </a:lnTo>
+                  <a:lnTo>
+                    <a:pt x="2506788" y="2690842"/>
+                  </a:lnTo>
+                  <a:lnTo>
+                    <a:pt x="2435165" y="2692136"/>
+                  </a:lnTo>
+                  <a:lnTo>
+                    <a:pt x="2363543" y="2693427"/>
+                  </a:lnTo>
+                  <a:lnTo>
+                    <a:pt x="2291920" y="2694716"/>
+                  </a:lnTo>
+                  <a:lnTo>
+                    <a:pt x="2220298" y="2696003"/>
+                  </a:lnTo>
+                  <a:lnTo>
+                    <a:pt x="2148675" y="2697288"/>
+                  </a:lnTo>
+                  <a:lnTo>
+                    <a:pt x="2077053" y="2698571"/>
+                  </a:lnTo>
+                  <a:lnTo>
+                    <a:pt x="2005430" y="2699852"/>
+                  </a:lnTo>
+                  <a:lnTo>
+                    <a:pt x="1933808" y="2701131"/>
+                  </a:lnTo>
+                  <a:lnTo>
+                    <a:pt x="1862185" y="2702407"/>
+                  </a:lnTo>
+                  <a:lnTo>
+                    <a:pt x="1790563" y="2703682"/>
+                  </a:lnTo>
+                  <a:lnTo>
+                    <a:pt x="1718940" y="2704954"/>
+                  </a:lnTo>
+                  <a:lnTo>
+                    <a:pt x="1647318" y="2706225"/>
+                  </a:lnTo>
+                  <a:lnTo>
+                    <a:pt x="1575695" y="2707493"/>
+                  </a:lnTo>
+                  <a:lnTo>
+                    <a:pt x="1504073" y="2708759"/>
+                  </a:lnTo>
+                  <a:lnTo>
+                    <a:pt x="1432450" y="2710024"/>
+                  </a:lnTo>
+                  <a:lnTo>
+                    <a:pt x="1360827" y="2711286"/>
+                  </a:lnTo>
+                  <a:lnTo>
+                    <a:pt x="1289205" y="2712546"/>
+                  </a:lnTo>
+                  <a:lnTo>
+                    <a:pt x="1217582" y="2713804"/>
+                  </a:lnTo>
+                  <a:lnTo>
+                    <a:pt x="1145960" y="2715060"/>
+                  </a:lnTo>
+                  <a:lnTo>
+                    <a:pt x="1074337" y="2716314"/>
+                  </a:lnTo>
+                  <a:lnTo>
+                    <a:pt x="1002715" y="2717565"/>
+                  </a:lnTo>
+                  <a:lnTo>
+                    <a:pt x="931092" y="2718815"/>
+                  </a:lnTo>
+                  <a:lnTo>
+                    <a:pt x="859470" y="2720063"/>
+                  </a:lnTo>
+                  <a:lnTo>
+                    <a:pt x="787847" y="2721309"/>
+                  </a:lnTo>
+                  <a:lnTo>
+                    <a:pt x="716225" y="2722553"/>
+                  </a:lnTo>
+                  <a:lnTo>
+                    <a:pt x="644602" y="2723794"/>
+                  </a:lnTo>
+                  <a:lnTo>
+                    <a:pt x="572980" y="2725034"/>
+                  </a:lnTo>
+                  <a:lnTo>
+                    <a:pt x="501357" y="2726271"/>
+                  </a:lnTo>
+                  <a:lnTo>
+                    <a:pt x="429735" y="2727507"/>
+                  </a:lnTo>
+                  <a:lnTo>
+                    <a:pt x="358112" y="2728741"/>
+                  </a:lnTo>
+                  <a:lnTo>
+                    <a:pt x="286490" y="2729972"/>
+                  </a:lnTo>
+                  <a:lnTo>
+                    <a:pt x="214867" y="2731202"/>
+                  </a:lnTo>
+                  <a:lnTo>
+                    <a:pt x="143245" y="2732429"/>
+                  </a:lnTo>
+                  <a:lnTo>
+                    <a:pt x="71622" y="2733655"/>
+                  </a:lnTo>
+                  <a:lnTo>
+                    <a:pt x="0" y="2734879"/>
                   </a:lnTo>
                   <a:close/>
                 </a:path>
@@ -3433,198 +3433,198 @@
           </p:nvSpPr>
           <p:spPr>
             <a:xfrm>
-              <a:off x="3921471" y="2073503"/>
-              <a:ext cx="4341207" cy="2653534"/>
+              <a:off x="3929109" y="2073503"/>
+              <a:ext cx="4333569" cy="2653756"/>
             </a:xfrm>
             <a:custGeom>
               <a:avLst/>
               <a:pathLst>
-                <a:path w="4341207" h="2653534">
+                <a:path w="4333569" h="2653756">
                   <a:moveTo>
                     <a:pt x="0" y="0"/>
                   </a:moveTo>
                   <a:lnTo>
-                    <a:pt x="43856" y="126890"/>
-                  </a:lnTo>
-                  <a:lnTo>
-                    <a:pt x="115478" y="322069"/>
-                  </a:lnTo>
-                  <a:lnTo>
-                    <a:pt x="187101" y="505900"/>
-                  </a:lnTo>
-                  <a:lnTo>
-                    <a:pt x="258723" y="679042"/>
-                  </a:lnTo>
-                  <a:lnTo>
-                    <a:pt x="330346" y="842117"/>
-                  </a:lnTo>
-                  <a:lnTo>
-                    <a:pt x="401968" y="995711"/>
-                  </a:lnTo>
-                  <a:lnTo>
-                    <a:pt x="473591" y="1140374"/>
-                  </a:lnTo>
-                  <a:lnTo>
-                    <a:pt x="545213" y="1276626"/>
-                  </a:lnTo>
-                  <a:lnTo>
-                    <a:pt x="616836" y="1404955"/>
-                  </a:lnTo>
-                  <a:lnTo>
-                    <a:pt x="688458" y="1525823"/>
-                  </a:lnTo>
-                  <a:lnTo>
-                    <a:pt x="760081" y="1639664"/>
-                  </a:lnTo>
-                  <a:lnTo>
-                    <a:pt x="831703" y="1746885"/>
-                  </a:lnTo>
-                  <a:lnTo>
-                    <a:pt x="903326" y="1847872"/>
-                  </a:lnTo>
-                  <a:lnTo>
-                    <a:pt x="974948" y="1942988"/>
-                  </a:lnTo>
-                  <a:lnTo>
-                    <a:pt x="1046571" y="2032573"/>
-                  </a:lnTo>
-                  <a:lnTo>
-                    <a:pt x="1118193" y="2116949"/>
-                  </a:lnTo>
-                  <a:lnTo>
-                    <a:pt x="1189816" y="2196419"/>
-                  </a:lnTo>
-                  <a:lnTo>
-                    <a:pt x="1261438" y="2271269"/>
-                  </a:lnTo>
-                  <a:lnTo>
-                    <a:pt x="1333061" y="2341767"/>
-                  </a:lnTo>
-                  <a:lnTo>
-                    <a:pt x="1404684" y="2408165"/>
-                  </a:lnTo>
-                  <a:lnTo>
-                    <a:pt x="1476306" y="2470703"/>
-                  </a:lnTo>
-                  <a:lnTo>
-                    <a:pt x="1547929" y="2529605"/>
-                  </a:lnTo>
-                  <a:lnTo>
-                    <a:pt x="1619551" y="2585082"/>
-                  </a:lnTo>
-                  <a:lnTo>
-                    <a:pt x="1691174" y="2637334"/>
-                  </a:lnTo>
-                  <a:lnTo>
-                    <a:pt x="1762796" y="2653534"/>
-                  </a:lnTo>
-                  <a:lnTo>
-                    <a:pt x="1834419" y="2652402"/>
-                  </a:lnTo>
-                  <a:lnTo>
-                    <a:pt x="1906041" y="2651269"/>
-                  </a:lnTo>
-                  <a:lnTo>
-                    <a:pt x="1977664" y="2650134"/>
-                  </a:lnTo>
-                  <a:lnTo>
-                    <a:pt x="2049286" y="2648998"/>
-                  </a:lnTo>
-                  <a:lnTo>
-                    <a:pt x="2120909" y="2647860"/>
-                  </a:lnTo>
-                  <a:lnTo>
-                    <a:pt x="2192531" y="2646721"/>
-                  </a:lnTo>
-                  <a:lnTo>
-                    <a:pt x="2264154" y="2645580"/>
-                  </a:lnTo>
-                  <a:lnTo>
-                    <a:pt x="2335776" y="2644437"/>
-                  </a:lnTo>
-                  <a:lnTo>
-                    <a:pt x="2407399" y="2643293"/>
-                  </a:lnTo>
-                  <a:lnTo>
-                    <a:pt x="2479021" y="2642147"/>
-                  </a:lnTo>
-                  <a:lnTo>
-                    <a:pt x="2550644" y="2641000"/>
-                  </a:lnTo>
-                  <a:lnTo>
-                    <a:pt x="2622266" y="2639851"/>
-                  </a:lnTo>
-                  <a:lnTo>
-                    <a:pt x="2693889" y="2638701"/>
-                  </a:lnTo>
-                  <a:lnTo>
-                    <a:pt x="2765511" y="2637549"/>
-                  </a:lnTo>
-                  <a:lnTo>
-                    <a:pt x="2837134" y="2636396"/>
-                  </a:lnTo>
-                  <a:lnTo>
-                    <a:pt x="2908757" y="2635241"/>
-                  </a:lnTo>
-                  <a:lnTo>
-                    <a:pt x="2980379" y="2634084"/>
-                  </a:lnTo>
-                  <a:lnTo>
-                    <a:pt x="3052002" y="2632926"/>
-                  </a:lnTo>
-                  <a:lnTo>
-                    <a:pt x="3123624" y="2631766"/>
-                  </a:lnTo>
-                  <a:lnTo>
-                    <a:pt x="3195247" y="2630605"/>
-                  </a:lnTo>
-                  <a:lnTo>
-                    <a:pt x="3266869" y="2629442"/>
-                  </a:lnTo>
-                  <a:lnTo>
-                    <a:pt x="3338492" y="2628277"/>
-                  </a:lnTo>
-                  <a:lnTo>
-                    <a:pt x="3410114" y="2627111"/>
-                  </a:lnTo>
-                  <a:lnTo>
-                    <a:pt x="3481737" y="2625943"/>
-                  </a:lnTo>
-                  <a:lnTo>
-                    <a:pt x="3553359" y="2624774"/>
-                  </a:lnTo>
-                  <a:lnTo>
-                    <a:pt x="3624982" y="2623603"/>
-                  </a:lnTo>
-                  <a:lnTo>
-                    <a:pt x="3696604" y="2622430"/>
-                  </a:lnTo>
-                  <a:lnTo>
-                    <a:pt x="3768227" y="2621256"/>
-                  </a:lnTo>
-                  <a:lnTo>
-                    <a:pt x="3839849" y="2620081"/>
-                  </a:lnTo>
-                  <a:lnTo>
-                    <a:pt x="3911472" y="2618903"/>
-                  </a:lnTo>
-                  <a:lnTo>
-                    <a:pt x="3983094" y="2617724"/>
-                  </a:lnTo>
-                  <a:lnTo>
-                    <a:pt x="4054717" y="2616544"/>
-                  </a:lnTo>
-                  <a:lnTo>
-                    <a:pt x="4126339" y="2615362"/>
-                  </a:lnTo>
-                  <a:lnTo>
-                    <a:pt x="4197962" y="2614178"/>
-                  </a:lnTo>
-                  <a:lnTo>
-                    <a:pt x="4269585" y="2612993"/>
-                  </a:lnTo>
-                  <a:lnTo>
-                    <a:pt x="4341207" y="2611806"/>
+                    <a:pt x="36218" y="104731"/>
+                  </a:lnTo>
+                  <a:lnTo>
+                    <a:pt x="107840" y="299878"/>
+                  </a:lnTo>
+                  <a:lnTo>
+                    <a:pt x="179463" y="483754"/>
+                  </a:lnTo>
+                  <a:lnTo>
+                    <a:pt x="251085" y="657012"/>
+                  </a:lnTo>
+                  <a:lnTo>
+                    <a:pt x="322708" y="820263"/>
+                  </a:lnTo>
+                  <a:lnTo>
+                    <a:pt x="394330" y="974086"/>
+                  </a:lnTo>
+                  <a:lnTo>
+                    <a:pt x="465953" y="1119026"/>
+                  </a:lnTo>
+                  <a:lnTo>
+                    <a:pt x="537575" y="1255595"/>
+                  </a:lnTo>
+                  <a:lnTo>
+                    <a:pt x="609198" y="1384276"/>
+                  </a:lnTo>
+                  <a:lnTo>
+                    <a:pt x="680821" y="1505526"/>
+                  </a:lnTo>
+                  <a:lnTo>
+                    <a:pt x="752443" y="1619774"/>
+                  </a:lnTo>
+                  <a:lnTo>
+                    <a:pt x="824066" y="1727423"/>
+                  </a:lnTo>
+                  <a:lnTo>
+                    <a:pt x="895688" y="1828855"/>
+                  </a:lnTo>
+                  <a:lnTo>
+                    <a:pt x="967311" y="1924430"/>
+                  </a:lnTo>
+                  <a:lnTo>
+                    <a:pt x="1038933" y="2014484"/>
+                  </a:lnTo>
+                  <a:lnTo>
+                    <a:pt x="1110556" y="2099338"/>
+                  </a:lnTo>
+                  <a:lnTo>
+                    <a:pt x="1182178" y="2179291"/>
+                  </a:lnTo>
+                  <a:lnTo>
+                    <a:pt x="1253801" y="2254627"/>
+                  </a:lnTo>
+                  <a:lnTo>
+                    <a:pt x="1325423" y="2325612"/>
+                  </a:lnTo>
+                  <a:lnTo>
+                    <a:pt x="1397046" y="2392497"/>
+                  </a:lnTo>
+                  <a:lnTo>
+                    <a:pt x="1468668" y="2455520"/>
+                  </a:lnTo>
+                  <a:lnTo>
+                    <a:pt x="1540291" y="2514903"/>
+                  </a:lnTo>
+                  <a:lnTo>
+                    <a:pt x="1611913" y="2570856"/>
+                  </a:lnTo>
+                  <a:lnTo>
+                    <a:pt x="1683536" y="2623578"/>
+                  </a:lnTo>
+                  <a:lnTo>
+                    <a:pt x="1755158" y="2653756"/>
+                  </a:lnTo>
+                  <a:lnTo>
+                    <a:pt x="1826781" y="2652400"/>
+                  </a:lnTo>
+                  <a:lnTo>
+                    <a:pt x="1898403" y="2651042"/>
+                  </a:lnTo>
+                  <a:lnTo>
+                    <a:pt x="1970026" y="2649681"/>
+                  </a:lnTo>
+                  <a:lnTo>
+                    <a:pt x="2041649" y="2648318"/>
+                  </a:lnTo>
+                  <a:lnTo>
+                    <a:pt x="2113271" y="2646953"/>
+                  </a:lnTo>
+                  <a:lnTo>
+                    <a:pt x="2184894" y="2645586"/>
+                  </a:lnTo>
+                  <a:lnTo>
+                    <a:pt x="2256516" y="2644216"/>
+                  </a:lnTo>
+                  <a:lnTo>
+                    <a:pt x="2328139" y="2642845"/>
+                  </a:lnTo>
+                  <a:lnTo>
+                    <a:pt x="2399761" y="2641471"/>
+                  </a:lnTo>
+                  <a:lnTo>
+                    <a:pt x="2471384" y="2640095"/>
+                  </a:lnTo>
+                  <a:lnTo>
+                    <a:pt x="2543006" y="2638716"/>
+                  </a:lnTo>
+                  <a:lnTo>
+                    <a:pt x="2614629" y="2637335"/>
+                  </a:lnTo>
+                  <a:lnTo>
+                    <a:pt x="2686251" y="2635953"/>
+                  </a:lnTo>
+                  <a:lnTo>
+                    <a:pt x="2757874" y="2634567"/>
+                  </a:lnTo>
+                  <a:lnTo>
+                    <a:pt x="2829496" y="2633180"/>
+                  </a:lnTo>
+                  <a:lnTo>
+                    <a:pt x="2901119" y="2631790"/>
+                  </a:lnTo>
+                  <a:lnTo>
+                    <a:pt x="2972741" y="2630398"/>
+                  </a:lnTo>
+                  <a:lnTo>
+                    <a:pt x="3044364" y="2629004"/>
+                  </a:lnTo>
+                  <a:lnTo>
+                    <a:pt x="3115986" y="2627607"/>
+                  </a:lnTo>
+                  <a:lnTo>
+                    <a:pt x="3187609" y="2626208"/>
+                  </a:lnTo>
+                  <a:lnTo>
+                    <a:pt x="3259231" y="2624807"/>
+                  </a:lnTo>
+                  <a:lnTo>
+                    <a:pt x="3330854" y="2623404"/>
+                  </a:lnTo>
+                  <a:lnTo>
+                    <a:pt x="3402477" y="2621998"/>
+                  </a:lnTo>
+                  <a:lnTo>
+                    <a:pt x="3474099" y="2620590"/>
+                  </a:lnTo>
+                  <a:lnTo>
+                    <a:pt x="3545722" y="2619180"/>
+                  </a:lnTo>
+                  <a:lnTo>
+                    <a:pt x="3617344" y="2617767"/>
+                  </a:lnTo>
+                  <a:lnTo>
+                    <a:pt x="3688967" y="2616352"/>
+                  </a:lnTo>
+                  <a:lnTo>
+                    <a:pt x="3760589" y="2614935"/>
+                  </a:lnTo>
+                  <a:lnTo>
+                    <a:pt x="3832212" y="2613515"/>
+                  </a:lnTo>
+                  <a:lnTo>
+                    <a:pt x="3903834" y="2612094"/>
+                  </a:lnTo>
+                  <a:lnTo>
+                    <a:pt x="3975457" y="2610669"/>
+                  </a:lnTo>
+                  <a:lnTo>
+                    <a:pt x="4047079" y="2609243"/>
+                  </a:lnTo>
+                  <a:lnTo>
+                    <a:pt x="4118702" y="2607814"/>
+                  </a:lnTo>
+                  <a:lnTo>
+                    <a:pt x="4190324" y="2606383"/>
+                  </a:lnTo>
+                  <a:lnTo>
+                    <a:pt x="4261947" y="2604949"/>
+                  </a:lnTo>
+                  <a:lnTo>
+                    <a:pt x="4333569" y="2603513"/>
                   </a:lnTo>
                 </a:path>
               </a:pathLst>
@@ -3644,312 +3644,312 @@
           </p:nvSpPr>
           <p:spPr>
             <a:xfrm>
-              <a:off x="1172049" y="4728167"/>
-              <a:ext cx="7090630" cy="736821"/>
+              <a:off x="1172049" y="4728613"/>
+              <a:ext cx="7090630" cy="733425"/>
             </a:xfrm>
             <a:custGeom>
               <a:avLst/>
               <a:pathLst>
-                <a:path w="7090630" h="736821">
+                <a:path w="7090630" h="733425">
                   <a:moveTo>
-                    <a:pt x="7090630" y="736821"/>
+                    <a:pt x="7090630" y="733425"/>
                   </a:moveTo>
                   <a:lnTo>
-                    <a:pt x="7019007" y="731125"/>
-                  </a:lnTo>
-                  <a:lnTo>
-                    <a:pt x="6947385" y="725078"/>
-                  </a:lnTo>
-                  <a:lnTo>
-                    <a:pt x="6875762" y="718657"/>
-                  </a:lnTo>
-                  <a:lnTo>
-                    <a:pt x="6804139" y="711841"/>
-                  </a:lnTo>
-                  <a:lnTo>
-                    <a:pt x="6732517" y="704603"/>
-                  </a:lnTo>
-                  <a:lnTo>
-                    <a:pt x="6660894" y="696919"/>
-                  </a:lnTo>
-                  <a:lnTo>
-                    <a:pt x="6589272" y="688760"/>
-                  </a:lnTo>
-                  <a:lnTo>
-                    <a:pt x="6517649" y="680097"/>
-                  </a:lnTo>
-                  <a:lnTo>
-                    <a:pt x="6446027" y="670900"/>
-                  </a:lnTo>
-                  <a:lnTo>
-                    <a:pt x="6374404" y="661135"/>
-                  </a:lnTo>
-                  <a:lnTo>
-                    <a:pt x="6302782" y="650767"/>
-                  </a:lnTo>
-                  <a:lnTo>
-                    <a:pt x="6231159" y="639760"/>
-                  </a:lnTo>
-                  <a:lnTo>
-                    <a:pt x="6159537" y="628072"/>
-                  </a:lnTo>
-                  <a:lnTo>
-                    <a:pt x="6087914" y="615663"/>
-                  </a:lnTo>
-                  <a:lnTo>
-                    <a:pt x="6016292" y="602488"/>
-                  </a:lnTo>
-                  <a:lnTo>
-                    <a:pt x="5944669" y="588500"/>
-                  </a:lnTo>
-                  <a:lnTo>
-                    <a:pt x="5873047" y="573648"/>
-                  </a:lnTo>
-                  <a:lnTo>
-                    <a:pt x="5801424" y="557880"/>
-                  </a:lnTo>
-                  <a:lnTo>
-                    <a:pt x="5729802" y="541138"/>
-                  </a:lnTo>
-                  <a:lnTo>
-                    <a:pt x="5658179" y="523362"/>
-                  </a:lnTo>
-                  <a:lnTo>
-                    <a:pt x="5586557" y="504489"/>
-                  </a:lnTo>
-                  <a:lnTo>
-                    <a:pt x="5514934" y="484451"/>
-                  </a:lnTo>
-                  <a:lnTo>
-                    <a:pt x="5443311" y="463176"/>
-                  </a:lnTo>
-                  <a:lnTo>
-                    <a:pt x="5371689" y="440588"/>
-                  </a:lnTo>
-                  <a:lnTo>
-                    <a:pt x="5300066" y="416605"/>
-                  </a:lnTo>
-                  <a:lnTo>
-                    <a:pt x="5228444" y="391142"/>
-                  </a:lnTo>
-                  <a:lnTo>
-                    <a:pt x="5156821" y="364106"/>
-                  </a:lnTo>
-                  <a:lnTo>
-                    <a:pt x="5085199" y="335402"/>
-                  </a:lnTo>
-                  <a:lnTo>
-                    <a:pt x="5013576" y="304926"/>
-                  </a:lnTo>
-                  <a:lnTo>
-                    <a:pt x="4941954" y="272568"/>
-                  </a:lnTo>
-                  <a:lnTo>
-                    <a:pt x="4870331" y="238213"/>
-                  </a:lnTo>
-                  <a:lnTo>
-                    <a:pt x="4798709" y="201737"/>
-                  </a:lnTo>
-                  <a:lnTo>
-                    <a:pt x="4727086" y="163010"/>
-                  </a:lnTo>
-                  <a:lnTo>
-                    <a:pt x="4655464" y="121891"/>
-                  </a:lnTo>
-                  <a:lnTo>
-                    <a:pt x="4583841" y="78234"/>
-                  </a:lnTo>
-                  <a:lnTo>
-                    <a:pt x="4512219" y="31882"/>
+                    <a:pt x="7019007" y="727590"/>
+                  </a:lnTo>
+                  <a:lnTo>
+                    <a:pt x="6947385" y="721396"/>
+                  </a:lnTo>
+                  <a:lnTo>
+                    <a:pt x="6875762" y="714823"/>
+                  </a:lnTo>
+                  <a:lnTo>
+                    <a:pt x="6804139" y="707847"/>
+                  </a:lnTo>
+                  <a:lnTo>
+                    <a:pt x="6732517" y="700444"/>
+                  </a:lnTo>
+                  <a:lnTo>
+                    <a:pt x="6660894" y="692587"/>
+                  </a:lnTo>
+                  <a:lnTo>
+                    <a:pt x="6589272" y="684248"/>
+                  </a:lnTo>
+                  <a:lnTo>
+                    <a:pt x="6517649" y="675398"/>
+                  </a:lnTo>
+                  <a:lnTo>
+                    <a:pt x="6446027" y="666006"/>
+                  </a:lnTo>
+                  <a:lnTo>
+                    <a:pt x="6374404" y="656038"/>
+                  </a:lnTo>
+                  <a:lnTo>
+                    <a:pt x="6302782" y="645459"/>
+                  </a:lnTo>
+                  <a:lnTo>
+                    <a:pt x="6231159" y="634231"/>
+                  </a:lnTo>
+                  <a:lnTo>
+                    <a:pt x="6159537" y="622316"/>
+                  </a:lnTo>
+                  <a:lnTo>
+                    <a:pt x="6087914" y="609670"/>
+                  </a:lnTo>
+                  <a:lnTo>
+                    <a:pt x="6016292" y="596249"/>
+                  </a:lnTo>
+                  <a:lnTo>
+                    <a:pt x="5944669" y="582005"/>
+                  </a:lnTo>
+                  <a:lnTo>
+                    <a:pt x="5873047" y="566889"/>
+                  </a:lnTo>
+                  <a:lnTo>
+                    <a:pt x="5801424" y="550846"/>
+                  </a:lnTo>
+                  <a:lnTo>
+                    <a:pt x="5729802" y="533819"/>
+                  </a:lnTo>
+                  <a:lnTo>
+                    <a:pt x="5658179" y="515749"/>
+                  </a:lnTo>
+                  <a:lnTo>
+                    <a:pt x="5586557" y="496571"/>
+                  </a:lnTo>
+                  <a:lnTo>
+                    <a:pt x="5514934" y="476218"/>
+                  </a:lnTo>
+                  <a:lnTo>
+                    <a:pt x="5443311" y="454618"/>
+                  </a:lnTo>
+                  <a:lnTo>
+                    <a:pt x="5371689" y="431693"/>
+                  </a:lnTo>
+                  <a:lnTo>
+                    <a:pt x="5300066" y="407364"/>
+                  </a:lnTo>
+                  <a:lnTo>
+                    <a:pt x="5228444" y="381543"/>
+                  </a:lnTo>
+                  <a:lnTo>
+                    <a:pt x="5156821" y="354140"/>
+                  </a:lnTo>
+                  <a:lnTo>
+                    <a:pt x="5085199" y="325057"/>
+                  </a:lnTo>
+                  <a:lnTo>
+                    <a:pt x="5013576" y="294191"/>
+                  </a:lnTo>
+                  <a:lnTo>
+                    <a:pt x="4941954" y="261434"/>
+                  </a:lnTo>
+                  <a:lnTo>
+                    <a:pt x="4870331" y="226668"/>
+                  </a:lnTo>
+                  <a:lnTo>
+                    <a:pt x="4798709" y="189772"/>
+                  </a:lnTo>
+                  <a:lnTo>
+                    <a:pt x="4727086" y="150615"/>
+                  </a:lnTo>
+                  <a:lnTo>
+                    <a:pt x="4655464" y="109057"/>
+                  </a:lnTo>
+                  <a:lnTo>
+                    <a:pt x="4583841" y="64952"/>
+                  </a:lnTo>
+                  <a:lnTo>
+                    <a:pt x="4512219" y="18144"/>
                   </a:lnTo>
                   <a:lnTo>
                     <a:pt x="4440596" y="0"/>
                   </a:lnTo>
                   <a:lnTo>
-                    <a:pt x="4368974" y="1128"/>
-                  </a:lnTo>
-                  <a:lnTo>
-                    <a:pt x="4297351" y="2255"/>
-                  </a:lnTo>
-                  <a:lnTo>
-                    <a:pt x="4225729" y="3381"/>
-                  </a:lnTo>
-                  <a:lnTo>
-                    <a:pt x="4154106" y="4505"/>
-                  </a:lnTo>
-                  <a:lnTo>
-                    <a:pt x="4082483" y="5627"/>
-                  </a:lnTo>
-                  <a:lnTo>
-                    <a:pt x="4010861" y="6748"/>
-                  </a:lnTo>
-                  <a:lnTo>
-                    <a:pt x="3939238" y="7868"/>
-                  </a:lnTo>
-                  <a:lnTo>
-                    <a:pt x="3867616" y="8986"/>
-                  </a:lnTo>
-                  <a:lnTo>
-                    <a:pt x="3795993" y="10102"/>
-                  </a:lnTo>
-                  <a:lnTo>
-                    <a:pt x="3724371" y="11217"/>
-                  </a:lnTo>
-                  <a:lnTo>
-                    <a:pt x="3652748" y="12330"/>
-                  </a:lnTo>
-                  <a:lnTo>
-                    <a:pt x="3581126" y="13442"/>
-                  </a:lnTo>
-                  <a:lnTo>
-                    <a:pt x="3509503" y="14552"/>
-                  </a:lnTo>
-                  <a:lnTo>
-                    <a:pt x="3437881" y="15661"/>
-                  </a:lnTo>
-                  <a:lnTo>
-                    <a:pt x="3366258" y="16769"/>
-                  </a:lnTo>
-                  <a:lnTo>
-                    <a:pt x="3294636" y="17874"/>
-                  </a:lnTo>
-                  <a:lnTo>
-                    <a:pt x="3223013" y="18979"/>
-                  </a:lnTo>
-                  <a:lnTo>
-                    <a:pt x="3151391" y="20081"/>
-                  </a:lnTo>
-                  <a:lnTo>
-                    <a:pt x="3079768" y="21183"/>
-                  </a:lnTo>
-                  <a:lnTo>
-                    <a:pt x="3008146" y="22282"/>
-                  </a:lnTo>
-                  <a:lnTo>
-                    <a:pt x="2936523" y="23381"/>
-                  </a:lnTo>
-                  <a:lnTo>
-                    <a:pt x="2864901" y="24478"/>
-                  </a:lnTo>
-                  <a:lnTo>
-                    <a:pt x="2793278" y="25573"/>
-                  </a:lnTo>
-                  <a:lnTo>
-                    <a:pt x="2721655" y="26667"/>
-                  </a:lnTo>
-                  <a:lnTo>
-                    <a:pt x="2650033" y="27759"/>
-                  </a:lnTo>
-                  <a:lnTo>
-                    <a:pt x="2578410" y="28850"/>
-                  </a:lnTo>
-                  <a:lnTo>
-                    <a:pt x="2506788" y="29939"/>
-                  </a:lnTo>
-                  <a:lnTo>
-                    <a:pt x="2435165" y="31027"/>
-                  </a:lnTo>
-                  <a:lnTo>
-                    <a:pt x="2363543" y="32113"/>
-                  </a:lnTo>
-                  <a:lnTo>
-                    <a:pt x="2291920" y="33198"/>
-                  </a:lnTo>
-                  <a:lnTo>
-                    <a:pt x="2220298" y="34282"/>
-                  </a:lnTo>
-                  <a:lnTo>
-                    <a:pt x="2148675" y="35364"/>
-                  </a:lnTo>
-                  <a:lnTo>
-                    <a:pt x="2077053" y="36444"/>
-                  </a:lnTo>
-                  <a:lnTo>
-                    <a:pt x="2005430" y="37523"/>
-                  </a:lnTo>
-                  <a:lnTo>
-                    <a:pt x="1933808" y="38601"/>
-                  </a:lnTo>
-                  <a:lnTo>
-                    <a:pt x="1862185" y="39677"/>
-                  </a:lnTo>
-                  <a:lnTo>
-                    <a:pt x="1790563" y="40751"/>
-                  </a:lnTo>
-                  <a:lnTo>
-                    <a:pt x="1718940" y="41825"/>
-                  </a:lnTo>
-                  <a:lnTo>
-                    <a:pt x="1647318" y="42896"/>
-                  </a:lnTo>
-                  <a:lnTo>
-                    <a:pt x="1575695" y="43967"/>
-                  </a:lnTo>
-                  <a:lnTo>
-                    <a:pt x="1504073" y="45035"/>
-                  </a:lnTo>
-                  <a:lnTo>
-                    <a:pt x="1432450" y="46103"/>
-                  </a:lnTo>
-                  <a:lnTo>
-                    <a:pt x="1360827" y="47169"/>
-                  </a:lnTo>
-                  <a:lnTo>
-                    <a:pt x="1289205" y="48233"/>
-                  </a:lnTo>
-                  <a:lnTo>
-                    <a:pt x="1217582" y="49296"/>
-                  </a:lnTo>
-                  <a:lnTo>
-                    <a:pt x="1145960" y="50357"/>
-                  </a:lnTo>
-                  <a:lnTo>
-                    <a:pt x="1074337" y="51417"/>
-                  </a:lnTo>
-                  <a:lnTo>
-                    <a:pt x="1002715" y="52476"/>
-                  </a:lnTo>
-                  <a:lnTo>
-                    <a:pt x="931092" y="53533"/>
-                  </a:lnTo>
-                  <a:lnTo>
-                    <a:pt x="859470" y="54589"/>
-                  </a:lnTo>
-                  <a:lnTo>
-                    <a:pt x="787847" y="55643"/>
-                  </a:lnTo>
-                  <a:lnTo>
-                    <a:pt x="716225" y="56696"/>
-                  </a:lnTo>
-                  <a:lnTo>
-                    <a:pt x="644602" y="57748"/>
-                  </a:lnTo>
-                  <a:lnTo>
-                    <a:pt x="572980" y="58798"/>
-                  </a:lnTo>
-                  <a:lnTo>
-                    <a:pt x="501357" y="59846"/>
-                  </a:lnTo>
-                  <a:lnTo>
-                    <a:pt x="429735" y="60893"/>
-                  </a:lnTo>
-                  <a:lnTo>
-                    <a:pt x="358112" y="61939"/>
-                  </a:lnTo>
-                  <a:lnTo>
-                    <a:pt x="286490" y="62983"/>
-                  </a:lnTo>
-                  <a:lnTo>
-                    <a:pt x="214867" y="64026"/>
-                  </a:lnTo>
-                  <a:lnTo>
-                    <a:pt x="143245" y="65068"/>
-                  </a:lnTo>
-                  <a:lnTo>
-                    <a:pt x="71622" y="66108"/>
-                  </a:lnTo>
-                  <a:lnTo>
-                    <a:pt x="0" y="67147"/>
+                    <a:pt x="4368974" y="1351"/>
+                  </a:lnTo>
+                  <a:lnTo>
+                    <a:pt x="4297351" y="2701"/>
+                  </a:lnTo>
+                  <a:lnTo>
+                    <a:pt x="4225729" y="4048"/>
+                  </a:lnTo>
+                  <a:lnTo>
+                    <a:pt x="4154106" y="5393"/>
+                  </a:lnTo>
+                  <a:lnTo>
+                    <a:pt x="4082483" y="6736"/>
+                  </a:lnTo>
+                  <a:lnTo>
+                    <a:pt x="4010861" y="8077"/>
+                  </a:lnTo>
+                  <a:lnTo>
+                    <a:pt x="3939238" y="9415"/>
+                  </a:lnTo>
+                  <a:lnTo>
+                    <a:pt x="3867616" y="10752"/>
+                  </a:lnTo>
+                  <a:lnTo>
+                    <a:pt x="3795993" y="12086"/>
+                  </a:lnTo>
+                  <a:lnTo>
+                    <a:pt x="3724371" y="13418"/>
+                  </a:lnTo>
+                  <a:lnTo>
+                    <a:pt x="3652748" y="14748"/>
+                  </a:lnTo>
+                  <a:lnTo>
+                    <a:pt x="3581126" y="16075"/>
+                  </a:lnTo>
+                  <a:lnTo>
+                    <a:pt x="3509503" y="17401"/>
+                  </a:lnTo>
+                  <a:lnTo>
+                    <a:pt x="3437881" y="18724"/>
+                  </a:lnTo>
+                  <a:lnTo>
+                    <a:pt x="3366258" y="20045"/>
+                  </a:lnTo>
+                  <a:lnTo>
+                    <a:pt x="3294636" y="21364"/>
+                  </a:lnTo>
+                  <a:lnTo>
+                    <a:pt x="3223013" y="22681"/>
+                  </a:lnTo>
+                  <a:lnTo>
+                    <a:pt x="3151391" y="23996"/>
+                  </a:lnTo>
+                  <a:lnTo>
+                    <a:pt x="3079768" y="25308"/>
+                  </a:lnTo>
+                  <a:lnTo>
+                    <a:pt x="3008146" y="26619"/>
+                  </a:lnTo>
+                  <a:lnTo>
+                    <a:pt x="2936523" y="27927"/>
+                  </a:lnTo>
+                  <a:lnTo>
+                    <a:pt x="2864901" y="29233"/>
+                  </a:lnTo>
+                  <a:lnTo>
+                    <a:pt x="2793278" y="30537"/>
+                  </a:lnTo>
+                  <a:lnTo>
+                    <a:pt x="2721655" y="31839"/>
+                  </a:lnTo>
+                  <a:lnTo>
+                    <a:pt x="2650033" y="33139"/>
+                  </a:lnTo>
+                  <a:lnTo>
+                    <a:pt x="2578410" y="34436"/>
+                  </a:lnTo>
+                  <a:lnTo>
+                    <a:pt x="2506788" y="35732"/>
+                  </a:lnTo>
+                  <a:lnTo>
+                    <a:pt x="2435165" y="37025"/>
+                  </a:lnTo>
+                  <a:lnTo>
+                    <a:pt x="2363543" y="38317"/>
+                  </a:lnTo>
+                  <a:lnTo>
+                    <a:pt x="2291920" y="39606"/>
+                  </a:lnTo>
+                  <a:lnTo>
+                    <a:pt x="2220298" y="40893"/>
+                  </a:lnTo>
+                  <a:lnTo>
+                    <a:pt x="2148675" y="42178"/>
+                  </a:lnTo>
+                  <a:lnTo>
+                    <a:pt x="2077053" y="43461"/>
+                  </a:lnTo>
+                  <a:lnTo>
+                    <a:pt x="2005430" y="44742"/>
+                  </a:lnTo>
+                  <a:lnTo>
+                    <a:pt x="1933808" y="46020"/>
+                  </a:lnTo>
+                  <a:lnTo>
+                    <a:pt x="1862185" y="47297"/>
+                  </a:lnTo>
+                  <a:lnTo>
+                    <a:pt x="1790563" y="48572"/>
+                  </a:lnTo>
+                  <a:lnTo>
+                    <a:pt x="1718940" y="49844"/>
+                  </a:lnTo>
+                  <a:lnTo>
+                    <a:pt x="1647318" y="51114"/>
+                  </a:lnTo>
+                  <a:lnTo>
+                    <a:pt x="1575695" y="52383"/>
+                  </a:lnTo>
+                  <a:lnTo>
+                    <a:pt x="1504073" y="53649"/>
+                  </a:lnTo>
+                  <a:lnTo>
+                    <a:pt x="1432450" y="54913"/>
+                  </a:lnTo>
+                  <a:lnTo>
+                    <a:pt x="1360827" y="56175"/>
+                  </a:lnTo>
+                  <a:lnTo>
+                    <a:pt x="1289205" y="57435"/>
+                  </a:lnTo>
+                  <a:lnTo>
+                    <a:pt x="1217582" y="58693"/>
+                  </a:lnTo>
+                  <a:lnTo>
+                    <a:pt x="1145960" y="59949"/>
+                  </a:lnTo>
+                  <a:lnTo>
+                    <a:pt x="1074337" y="61203"/>
+                  </a:lnTo>
+                  <a:lnTo>
+                    <a:pt x="1002715" y="62455"/>
+                  </a:lnTo>
+                  <a:lnTo>
+                    <a:pt x="931092" y="63705"/>
+                  </a:lnTo>
+                  <a:lnTo>
+                    <a:pt x="859470" y="64953"/>
+                  </a:lnTo>
+                  <a:lnTo>
+                    <a:pt x="787847" y="66198"/>
+                  </a:lnTo>
+                  <a:lnTo>
+                    <a:pt x="716225" y="67442"/>
+                  </a:lnTo>
+                  <a:lnTo>
+                    <a:pt x="644602" y="68684"/>
+                  </a:lnTo>
+                  <a:lnTo>
+                    <a:pt x="572980" y="69923"/>
+                  </a:lnTo>
+                  <a:lnTo>
+                    <a:pt x="501357" y="71161"/>
+                  </a:lnTo>
+                  <a:lnTo>
+                    <a:pt x="429735" y="72397"/>
+                  </a:lnTo>
+                  <a:lnTo>
+                    <a:pt x="358112" y="73630"/>
+                  </a:lnTo>
+                  <a:lnTo>
+                    <a:pt x="286490" y="74862"/>
+                  </a:lnTo>
+                  <a:lnTo>
+                    <a:pt x="214867" y="76091"/>
+                  </a:lnTo>
+                  <a:lnTo>
+                    <a:pt x="143245" y="77319"/>
+                  </a:lnTo>
+                  <a:lnTo>
+                    <a:pt x="71622" y="78545"/>
+                  </a:lnTo>
+                  <a:lnTo>
+                    <a:pt x="0" y="79768"/>
                   </a:lnTo>
                 </a:path>
               </a:pathLst>
@@ -3969,273 +3969,273 @@
           </p:nvSpPr>
           <p:spPr>
             <a:xfrm>
-              <a:off x="2125466" y="2073503"/>
-              <a:ext cx="6137213" cy="3200116"/>
+              <a:off x="2103232" y="2073503"/>
+              <a:ext cx="6159447" cy="3194251"/>
             </a:xfrm>
             <a:custGeom>
               <a:avLst/>
               <a:pathLst>
-                <a:path w="6137213" h="3200116">
+                <a:path w="6159447" h="3194251">
                   <a:moveTo>
                     <a:pt x="0" y="0"/>
                   </a:moveTo>
                   <a:lnTo>
-                    <a:pt x="49298" y="69796"/>
-                  </a:lnTo>
-                  <a:lnTo>
-                    <a:pt x="120920" y="168274"/>
-                  </a:lnTo>
-                  <a:lnTo>
-                    <a:pt x="192543" y="263912"/>
-                  </a:lnTo>
-                  <a:lnTo>
-                    <a:pt x="264165" y="356791"/>
-                  </a:lnTo>
-                  <a:lnTo>
-                    <a:pt x="335788" y="446990"/>
-                  </a:lnTo>
-                  <a:lnTo>
-                    <a:pt x="407411" y="534588"/>
-                  </a:lnTo>
-                  <a:lnTo>
-                    <a:pt x="479033" y="619659"/>
-                  </a:lnTo>
-                  <a:lnTo>
-                    <a:pt x="550656" y="702276"/>
-                  </a:lnTo>
-                  <a:lnTo>
-                    <a:pt x="622278" y="782510"/>
-                  </a:lnTo>
-                  <a:lnTo>
-                    <a:pt x="693901" y="860429"/>
-                  </a:lnTo>
-                  <a:lnTo>
-                    <a:pt x="765523" y="936101"/>
-                  </a:lnTo>
-                  <a:lnTo>
-                    <a:pt x="837146" y="1009590"/>
-                  </a:lnTo>
-                  <a:lnTo>
-                    <a:pt x="908768" y="1080959"/>
-                  </a:lnTo>
-                  <a:lnTo>
-                    <a:pt x="980391" y="1150269"/>
-                  </a:lnTo>
-                  <a:lnTo>
-                    <a:pt x="1052013" y="1217580"/>
-                  </a:lnTo>
-                  <a:lnTo>
-                    <a:pt x="1123636" y="1282950"/>
-                  </a:lnTo>
-                  <a:lnTo>
-                    <a:pt x="1195258" y="1346434"/>
-                  </a:lnTo>
-                  <a:lnTo>
-                    <a:pt x="1266881" y="1408086"/>
-                  </a:lnTo>
-                  <a:lnTo>
-                    <a:pt x="1338503" y="1467960"/>
-                  </a:lnTo>
-                  <a:lnTo>
-                    <a:pt x="1410126" y="1526107"/>
-                  </a:lnTo>
-                  <a:lnTo>
-                    <a:pt x="1481748" y="1582577"/>
-                  </a:lnTo>
-                  <a:lnTo>
-                    <a:pt x="1553371" y="1637418"/>
-                  </a:lnTo>
-                  <a:lnTo>
-                    <a:pt x="1624993" y="1690677"/>
-                  </a:lnTo>
-                  <a:lnTo>
-                    <a:pt x="1696616" y="1742399"/>
-                  </a:lnTo>
-                  <a:lnTo>
-                    <a:pt x="1768239" y="1792630"/>
-                  </a:lnTo>
-                  <a:lnTo>
-                    <a:pt x="1839861" y="1841412"/>
-                  </a:lnTo>
-                  <a:lnTo>
-                    <a:pt x="1911484" y="1888786"/>
-                  </a:lnTo>
-                  <a:lnTo>
-                    <a:pt x="1983106" y="1934794"/>
-                  </a:lnTo>
-                  <a:lnTo>
-                    <a:pt x="2054729" y="1979475"/>
-                  </a:lnTo>
-                  <a:lnTo>
-                    <a:pt x="2126351" y="2022867"/>
-                  </a:lnTo>
-                  <a:lnTo>
-                    <a:pt x="2197974" y="2065007"/>
-                  </a:lnTo>
-                  <a:lnTo>
-                    <a:pt x="2269596" y="2105932"/>
-                  </a:lnTo>
-                  <a:lnTo>
-                    <a:pt x="2341219" y="2145676"/>
-                  </a:lnTo>
-                  <a:lnTo>
-                    <a:pt x="2412841" y="2184274"/>
-                  </a:lnTo>
-                  <a:lnTo>
-                    <a:pt x="2484464" y="2221758"/>
-                  </a:lnTo>
-                  <a:lnTo>
-                    <a:pt x="2556086" y="2258161"/>
-                  </a:lnTo>
-                  <a:lnTo>
-                    <a:pt x="2627709" y="2293514"/>
-                  </a:lnTo>
-                  <a:lnTo>
-                    <a:pt x="2699331" y="2327847"/>
-                  </a:lnTo>
-                  <a:lnTo>
-                    <a:pt x="2770954" y="2361190"/>
-                  </a:lnTo>
-                  <a:lnTo>
-                    <a:pt x="2842576" y="2393571"/>
-                  </a:lnTo>
-                  <a:lnTo>
-                    <a:pt x="2914199" y="2425018"/>
-                  </a:lnTo>
-                  <a:lnTo>
-                    <a:pt x="2985821" y="2455558"/>
-                  </a:lnTo>
-                  <a:lnTo>
-                    <a:pt x="3057444" y="2485217"/>
-                  </a:lnTo>
-                  <a:lnTo>
-                    <a:pt x="3129067" y="2514021"/>
-                  </a:lnTo>
-                  <a:lnTo>
-                    <a:pt x="3200689" y="2541993"/>
-                  </a:lnTo>
-                  <a:lnTo>
-                    <a:pt x="3272312" y="2569159"/>
-                  </a:lnTo>
-                  <a:lnTo>
-                    <a:pt x="3343934" y="2595541"/>
-                  </a:lnTo>
-                  <a:lnTo>
-                    <a:pt x="3415557" y="2621162"/>
-                  </a:lnTo>
-                  <a:lnTo>
-                    <a:pt x="3487179" y="2646044"/>
-                  </a:lnTo>
-                  <a:lnTo>
-                    <a:pt x="3558802" y="2670208"/>
-                  </a:lnTo>
-                  <a:lnTo>
-                    <a:pt x="3630424" y="2693675"/>
-                  </a:lnTo>
-                  <a:lnTo>
-                    <a:pt x="3702047" y="2716466"/>
-                  </a:lnTo>
-                  <a:lnTo>
-                    <a:pt x="3773669" y="2738598"/>
-                  </a:lnTo>
-                  <a:lnTo>
-                    <a:pt x="3845292" y="2760093"/>
-                  </a:lnTo>
-                  <a:lnTo>
-                    <a:pt x="3916914" y="2780967"/>
-                  </a:lnTo>
-                  <a:lnTo>
-                    <a:pt x="3988537" y="2801239"/>
-                  </a:lnTo>
-                  <a:lnTo>
-                    <a:pt x="4060159" y="2820927"/>
-                  </a:lnTo>
-                  <a:lnTo>
-                    <a:pt x="4131782" y="2840046"/>
-                  </a:lnTo>
-                  <a:lnTo>
-                    <a:pt x="4203404" y="2858615"/>
-                  </a:lnTo>
-                  <a:lnTo>
-                    <a:pt x="4275027" y="2876647"/>
-                  </a:lnTo>
-                  <a:lnTo>
-                    <a:pt x="4346649" y="2894159"/>
-                  </a:lnTo>
-                  <a:lnTo>
-                    <a:pt x="4418272" y="2911166"/>
-                  </a:lnTo>
-                  <a:lnTo>
-                    <a:pt x="4489895" y="2927683"/>
-                  </a:lnTo>
-                  <a:lnTo>
-                    <a:pt x="4561517" y="2943723"/>
-                  </a:lnTo>
-                  <a:lnTo>
-                    <a:pt x="4633140" y="2959300"/>
-                  </a:lnTo>
-                  <a:lnTo>
-                    <a:pt x="4704762" y="2974429"/>
-                  </a:lnTo>
-                  <a:lnTo>
-                    <a:pt x="4776385" y="2989120"/>
-                  </a:lnTo>
-                  <a:lnTo>
-                    <a:pt x="4848007" y="3003388"/>
-                  </a:lnTo>
-                  <a:lnTo>
-                    <a:pt x="4919630" y="3017244"/>
-                  </a:lnTo>
-                  <a:lnTo>
-                    <a:pt x="4991252" y="3030701"/>
-                  </a:lnTo>
-                  <a:lnTo>
-                    <a:pt x="5062875" y="3043770"/>
-                  </a:lnTo>
-                  <a:lnTo>
-                    <a:pt x="5134497" y="3056461"/>
-                  </a:lnTo>
-                  <a:lnTo>
-                    <a:pt x="5206120" y="3068786"/>
-                  </a:lnTo>
-                  <a:lnTo>
-                    <a:pt x="5277742" y="3080756"/>
-                  </a:lnTo>
-                  <a:lnTo>
-                    <a:pt x="5349365" y="3092381"/>
-                  </a:lnTo>
-                  <a:lnTo>
-                    <a:pt x="5420987" y="3103670"/>
-                  </a:lnTo>
-                  <a:lnTo>
-                    <a:pt x="5492610" y="3114634"/>
-                  </a:lnTo>
-                  <a:lnTo>
-                    <a:pt x="5564232" y="3125281"/>
-                  </a:lnTo>
-                  <a:lnTo>
-                    <a:pt x="5635855" y="3135621"/>
-                  </a:lnTo>
-                  <a:lnTo>
-                    <a:pt x="5707477" y="3145663"/>
-                  </a:lnTo>
-                  <a:lnTo>
-                    <a:pt x="5779100" y="3155416"/>
-                  </a:lnTo>
-                  <a:lnTo>
-                    <a:pt x="5850723" y="3164887"/>
-                  </a:lnTo>
-                  <a:lnTo>
-                    <a:pt x="5922345" y="3174084"/>
-                  </a:lnTo>
-                  <a:lnTo>
-                    <a:pt x="5993968" y="3183017"/>
-                  </a:lnTo>
-                  <a:lnTo>
-                    <a:pt x="6065590" y="3191692"/>
-                  </a:lnTo>
-                  <a:lnTo>
-                    <a:pt x="6137213" y="3200116"/>
+                    <a:pt x="71532" y="99210"/>
+                  </a:lnTo>
+                  <a:lnTo>
+                    <a:pt x="143154" y="195714"/>
+                  </a:lnTo>
+                  <a:lnTo>
+                    <a:pt x="214777" y="289465"/>
+                  </a:lnTo>
+                  <a:lnTo>
+                    <a:pt x="286399" y="380544"/>
+                  </a:lnTo>
+                  <a:lnTo>
+                    <a:pt x="358022" y="469026"/>
+                  </a:lnTo>
+                  <a:lnTo>
+                    <a:pt x="429644" y="554985"/>
+                  </a:lnTo>
+                  <a:lnTo>
+                    <a:pt x="501267" y="638493"/>
+                  </a:lnTo>
+                  <a:lnTo>
+                    <a:pt x="572890" y="719620"/>
+                  </a:lnTo>
+                  <a:lnTo>
+                    <a:pt x="644512" y="798433"/>
+                  </a:lnTo>
+                  <a:lnTo>
+                    <a:pt x="716135" y="875000"/>
+                  </a:lnTo>
+                  <a:lnTo>
+                    <a:pt x="787757" y="949383"/>
+                  </a:lnTo>
+                  <a:lnTo>
+                    <a:pt x="859380" y="1021645"/>
+                  </a:lnTo>
+                  <a:lnTo>
+                    <a:pt x="931002" y="1091847"/>
+                  </a:lnTo>
+                  <a:lnTo>
+                    <a:pt x="1002625" y="1160048"/>
+                  </a:lnTo>
+                  <a:lnTo>
+                    <a:pt x="1074247" y="1226303"/>
+                  </a:lnTo>
+                  <a:lnTo>
+                    <a:pt x="1145870" y="1290670"/>
+                  </a:lnTo>
+                  <a:lnTo>
+                    <a:pt x="1217492" y="1353201"/>
+                  </a:lnTo>
+                  <a:lnTo>
+                    <a:pt x="1289115" y="1413950"/>
+                  </a:lnTo>
+                  <a:lnTo>
+                    <a:pt x="1360737" y="1472966"/>
+                  </a:lnTo>
+                  <a:lnTo>
+                    <a:pt x="1432360" y="1530299"/>
+                  </a:lnTo>
+                  <a:lnTo>
+                    <a:pt x="1503982" y="1585998"/>
+                  </a:lnTo>
+                  <a:lnTo>
+                    <a:pt x="1575605" y="1640109"/>
+                  </a:lnTo>
+                  <a:lnTo>
+                    <a:pt x="1647227" y="1692676"/>
+                  </a:lnTo>
+                  <a:lnTo>
+                    <a:pt x="1718850" y="1743745"/>
+                  </a:lnTo>
+                  <a:lnTo>
+                    <a:pt x="1790472" y="1793358"/>
+                  </a:lnTo>
+                  <a:lnTo>
+                    <a:pt x="1862095" y="1841556"/>
+                  </a:lnTo>
+                  <a:lnTo>
+                    <a:pt x="1933718" y="1888380"/>
+                  </a:lnTo>
+                  <a:lnTo>
+                    <a:pt x="2005340" y="1933869"/>
+                  </a:lnTo>
+                  <a:lnTo>
+                    <a:pt x="2076963" y="1978060"/>
+                  </a:lnTo>
+                  <a:lnTo>
+                    <a:pt x="2148585" y="2020992"/>
+                  </a:lnTo>
+                  <a:lnTo>
+                    <a:pt x="2220208" y="2062700"/>
+                  </a:lnTo>
+                  <a:lnTo>
+                    <a:pt x="2291830" y="2103218"/>
+                  </a:lnTo>
+                  <a:lnTo>
+                    <a:pt x="2363453" y="2142581"/>
+                  </a:lnTo>
+                  <a:lnTo>
+                    <a:pt x="2435075" y="2180822"/>
+                  </a:lnTo>
+                  <a:lnTo>
+                    <a:pt x="2506698" y="2217972"/>
+                  </a:lnTo>
+                  <a:lnTo>
+                    <a:pt x="2578320" y="2254063"/>
+                  </a:lnTo>
+                  <a:lnTo>
+                    <a:pt x="2649943" y="2289125"/>
+                  </a:lnTo>
+                  <a:lnTo>
+                    <a:pt x="2721565" y="2323188"/>
+                  </a:lnTo>
+                  <a:lnTo>
+                    <a:pt x="2793188" y="2356279"/>
+                  </a:lnTo>
+                  <a:lnTo>
+                    <a:pt x="2864810" y="2388426"/>
+                  </a:lnTo>
+                  <a:lnTo>
+                    <a:pt x="2936433" y="2419657"/>
+                  </a:lnTo>
+                  <a:lnTo>
+                    <a:pt x="3008055" y="2449998"/>
+                  </a:lnTo>
+                  <a:lnTo>
+                    <a:pt x="3079678" y="2479473"/>
+                  </a:lnTo>
+                  <a:lnTo>
+                    <a:pt x="3151300" y="2508108"/>
+                  </a:lnTo>
+                  <a:lnTo>
+                    <a:pt x="3222923" y="2535926"/>
+                  </a:lnTo>
+                  <a:lnTo>
+                    <a:pt x="3294546" y="2562951"/>
+                  </a:lnTo>
+                  <a:lnTo>
+                    <a:pt x="3366168" y="2589206"/>
+                  </a:lnTo>
+                  <a:lnTo>
+                    <a:pt x="3437791" y="2614712"/>
+                  </a:lnTo>
+                  <a:lnTo>
+                    <a:pt x="3509413" y="2639491"/>
+                  </a:lnTo>
+                  <a:lnTo>
+                    <a:pt x="3581036" y="2663563"/>
+                  </a:lnTo>
+                  <a:lnTo>
+                    <a:pt x="3652658" y="2686949"/>
+                  </a:lnTo>
+                  <a:lnTo>
+                    <a:pt x="3724281" y="2709668"/>
+                  </a:lnTo>
+                  <a:lnTo>
+                    <a:pt x="3795903" y="2731740"/>
+                  </a:lnTo>
+                  <a:lnTo>
+                    <a:pt x="3867526" y="2753182"/>
+                  </a:lnTo>
+                  <a:lnTo>
+                    <a:pt x="3939148" y="2774012"/>
+                  </a:lnTo>
+                  <a:lnTo>
+                    <a:pt x="4010771" y="2794249"/>
+                  </a:lnTo>
+                  <a:lnTo>
+                    <a:pt x="4082393" y="2813909"/>
+                  </a:lnTo>
+                  <a:lnTo>
+                    <a:pt x="4154016" y="2833008"/>
+                  </a:lnTo>
+                  <a:lnTo>
+                    <a:pt x="4225638" y="2851562"/>
+                  </a:lnTo>
+                  <a:lnTo>
+                    <a:pt x="4297261" y="2869588"/>
+                  </a:lnTo>
+                  <a:lnTo>
+                    <a:pt x="4368883" y="2887099"/>
+                  </a:lnTo>
+                  <a:lnTo>
+                    <a:pt x="4440506" y="2904112"/>
+                  </a:lnTo>
+                  <a:lnTo>
+                    <a:pt x="4512128" y="2920639"/>
+                  </a:lnTo>
+                  <a:lnTo>
+                    <a:pt x="4583751" y="2936695"/>
+                  </a:lnTo>
+                  <a:lnTo>
+                    <a:pt x="4655374" y="2952293"/>
+                  </a:lnTo>
+                  <a:lnTo>
+                    <a:pt x="4726996" y="2967446"/>
+                  </a:lnTo>
+                  <a:lnTo>
+                    <a:pt x="4798619" y="2982167"/>
+                  </a:lnTo>
+                  <a:lnTo>
+                    <a:pt x="4870241" y="2996469"/>
+                  </a:lnTo>
+                  <a:lnTo>
+                    <a:pt x="4941864" y="3010363"/>
+                  </a:lnTo>
+                  <a:lnTo>
+                    <a:pt x="5013486" y="3023860"/>
+                  </a:lnTo>
+                  <a:lnTo>
+                    <a:pt x="5085109" y="3036973"/>
+                  </a:lnTo>
+                  <a:lnTo>
+                    <a:pt x="5156731" y="3049712"/>
+                  </a:lnTo>
+                  <a:lnTo>
+                    <a:pt x="5228354" y="3062088"/>
+                  </a:lnTo>
+                  <a:lnTo>
+                    <a:pt x="5299976" y="3074110"/>
+                  </a:lnTo>
+                  <a:lnTo>
+                    <a:pt x="5371599" y="3085790"/>
+                  </a:lnTo>
+                  <a:lnTo>
+                    <a:pt x="5443221" y="3097137"/>
+                  </a:lnTo>
+                  <a:lnTo>
+                    <a:pt x="5514844" y="3108161"/>
+                  </a:lnTo>
+                  <a:lnTo>
+                    <a:pt x="5586466" y="3118870"/>
+                  </a:lnTo>
+                  <a:lnTo>
+                    <a:pt x="5658089" y="3129274"/>
+                  </a:lnTo>
+                  <a:lnTo>
+                    <a:pt x="5729711" y="3139381"/>
+                  </a:lnTo>
+                  <a:lnTo>
+                    <a:pt x="5801334" y="3149200"/>
+                  </a:lnTo>
+                  <a:lnTo>
+                    <a:pt x="5872956" y="3158738"/>
+                  </a:lnTo>
+                  <a:lnTo>
+                    <a:pt x="5944579" y="3168005"/>
+                  </a:lnTo>
+                  <a:lnTo>
+                    <a:pt x="6016202" y="3177008"/>
+                  </a:lnTo>
+                  <a:lnTo>
+                    <a:pt x="6087824" y="3185754"/>
+                  </a:lnTo>
+                  <a:lnTo>
+                    <a:pt x="6159447" y="3194251"/>
                   </a:lnTo>
                 </a:path>
               </a:pathLst>
@@ -4307,7 +4307,7 @@
           </p:nvSpPr>
           <p:spPr>
             <a:xfrm>
-              <a:off x="5636831" y="2073503"/>
+              <a:off x="5656410" y="2073503"/>
               <a:ext cx="0" cy="3649639"/>
             </a:xfrm>
             <a:custGeom>
@@ -4350,7 +4350,7 @@
           </p:nvSpPr>
           <p:spPr>
             <a:xfrm>
-              <a:off x="4328179" y="2073503"/>
+              <a:off x="4335733" y="2073503"/>
               <a:ext cx="0" cy="3649639"/>
             </a:xfrm>
             <a:custGeom>
@@ -4393,7 +4393,7 @@
           </p:nvSpPr>
           <p:spPr>
             <a:xfrm>
-              <a:off x="6683624" y="2073503"/>
+              <a:off x="6684598" y="2073503"/>
               <a:ext cx="0" cy="3649639"/>
             </a:xfrm>
             <a:custGeom>
@@ -4666,7 +4666,7 @@
           </p:nvSpPr>
           <p:spPr>
             <a:xfrm>
-              <a:off x="2970385" y="5785772"/>
+              <a:off x="2971977" y="5785772"/>
               <a:ext cx="161574" cy="80101"/>
             </a:xfrm>
             <a:prstGeom prst="rect">
@@ -4712,7 +4712,7 @@
           </p:nvSpPr>
           <p:spPr>
             <a:xfrm>
-              <a:off x="5501440" y="5785772"/>
+              <a:off x="5499574" y="5785772"/>
               <a:ext cx="62179" cy="80101"/>
             </a:xfrm>
             <a:prstGeom prst="rect">
@@ -4758,7 +4758,7 @@
           </p:nvSpPr>
           <p:spPr>
             <a:xfrm>
-              <a:off x="7951708" y="5785772"/>
+              <a:off x="7946384" y="5785772"/>
               <a:ext cx="124358" cy="80101"/>
             </a:xfrm>
             <a:prstGeom prst="rect">
@@ -4929,7 +4929,7 @@
                   <a:latin typeface="Helvetica"/>
                   <a:cs typeface="Helvetica"/>
                 </a:rPr>
-                <a:t>subHR per 10 mL/min decline: 1.50 (0.98-2.29), p_Bonf = 0.367 (n = 6)  |  per IQR decline (Δ = 23.7): 2.62 (0.96-7.17)  |  IQR: [-12.1, 11.6]</a:t>
+                <a:t>subHR per 10 mL/min decline: 1.49 (0.98-2.28), p_Bonf = 0.381 (n = 6)  |  per IQR decline (Δ = 23.7): 2.58 (0.95-7.03)  |  IQR: [-12.1, 11.6]</a:t>
               </a:r>
             </a:p>
           </p:txBody>
